--- a/contenus-portefeuille/jeko_v2.pptx
+++ b/contenus-portefeuille/jeko_v2.pptx
@@ -8521,7 +8521,7 @@
               </a:lnSpc>
             </a:pPr>
             <a:r>
-              <a:rPr sz="2800" b="1">
+              <a:rPr sz="2400" b="1">
                 <a:solidFill>
                   <a:srgbClr val="FFFFFF"/>
                 </a:solidFill>
@@ -8769,7 +8769,7 @@
               </a:lnSpc>
             </a:pPr>
             <a:r>
-              <a:rPr sz="2800" b="1">
+              <a:rPr sz="2400" b="1">
                 <a:solidFill>
                   <a:srgbClr val="3A0CA3"/>
                 </a:solidFill>
@@ -9017,7 +9017,7 @@
               </a:lnSpc>
             </a:pPr>
             <a:r>
-              <a:rPr sz="2800" b="1">
+              <a:rPr sz="2400" b="1">
                 <a:solidFill>
                   <a:srgbClr val="3A0CA3"/>
                 </a:solidFill>
